--- a/Formirovatel.pptx
+++ b/Formirovatel.pptx
@@ -5,7 +5,7 @@
     <p:sldMasterId id="2147483744" r:id="rId1"/>
   </p:sldMasterIdLst>
   <p:notesMasterIdLst>
-    <p:notesMasterId r:id="rId29"/>
+    <p:notesMasterId r:id="rId27"/>
   </p:notesMasterIdLst>
   <p:sldIdLst>
     <p:sldId id="257" r:id="rId2"/>
@@ -31,10 +31,8 @@
     <p:sldId id="288" r:id="rId22"/>
     <p:sldId id="287" r:id="rId23"/>
     <p:sldId id="289" r:id="rId24"/>
-    <p:sldId id="290" r:id="rId25"/>
-    <p:sldId id="291" r:id="rId26"/>
-    <p:sldId id="292" r:id="rId27"/>
-    <p:sldId id="262" r:id="rId28"/>
+    <p:sldId id="292" r:id="rId25"/>
+    <p:sldId id="262" r:id="rId26"/>
   </p:sldIdLst>
   <p:sldSz cx="9906000" cy="6858000" type="A4"/>
   <p:notesSz cx="6858000" cy="9144000"/>
@@ -235,7 +233,7 @@
             <a:fld id="{BE8B1232-C946-4467-9F78-128D224DB290}" type="datetimeFigureOut">
               <a:rPr lang="ru-RU" smtClean="0"/>
               <a:pPr/>
-              <a:t>04.05.2026</a:t>
+              <a:t>05.05.2026</a:t>
             </a:fld>
             <a:endParaRPr lang="ru-RU"/>
           </a:p>
@@ -766,7 +764,7 @@
           <a:p>
             <a:fld id="{95667598-63CA-44C1-B7A0-61FFAD5E45CA}" type="datetime1">
               <a:rPr lang="ru-RU" smtClean="0"/>
-              <a:t>04.05.2026</a:t>
+              <a:t>05.05.2026</a:t>
             </a:fld>
             <a:endParaRPr lang="ru-RU"/>
           </a:p>
@@ -930,7 +928,7 @@
           <a:p>
             <a:fld id="{E1EC58E5-40F5-4F2D-9639-D3B9D1C5DBDA}" type="datetime1">
               <a:rPr lang="ru-RU" smtClean="0"/>
-              <a:t>04.05.2026</a:t>
+              <a:t>05.05.2026</a:t>
             </a:fld>
             <a:endParaRPr lang="ru-RU"/>
           </a:p>
@@ -1104,7 +1102,7 @@
           <a:p>
             <a:fld id="{191B0927-5D39-4E1C-A20C-6BA25AD1EBA1}" type="datetime1">
               <a:rPr lang="ru-RU" smtClean="0"/>
-              <a:t>04.05.2026</a:t>
+              <a:t>05.05.2026</a:t>
             </a:fld>
             <a:endParaRPr lang="ru-RU"/>
           </a:p>
@@ -1268,7 +1266,7 @@
           <a:p>
             <a:fld id="{AB3020DC-9677-4D0B-899D-018DB1403295}" type="datetime1">
               <a:rPr lang="ru-RU" smtClean="0"/>
-              <a:t>04.05.2026</a:t>
+              <a:t>05.05.2026</a:t>
             </a:fld>
             <a:endParaRPr lang="ru-RU"/>
           </a:p>
@@ -1517,7 +1515,7 @@
           <a:p>
             <a:fld id="{879B7726-F2C2-408B-9ACF-E30B04B150AC}" type="datetime1">
               <a:rPr lang="ru-RU" smtClean="0"/>
-              <a:t>04.05.2026</a:t>
+              <a:t>05.05.2026</a:t>
             </a:fld>
             <a:endParaRPr lang="ru-RU"/>
           </a:p>
@@ -1798,7 +1796,7 @@
           <a:p>
             <a:fld id="{4ACC0285-F268-4DF9-8E7E-247826C3E457}" type="datetime1">
               <a:rPr lang="ru-RU" smtClean="0"/>
-              <a:t>04.05.2026</a:t>
+              <a:t>05.05.2026</a:t>
             </a:fld>
             <a:endParaRPr lang="ru-RU"/>
           </a:p>
@@ -2213,7 +2211,7 @@
           <a:p>
             <a:fld id="{686975AB-CA65-47D6-BD78-6E66A24BE33C}" type="datetime1">
               <a:rPr lang="ru-RU" smtClean="0"/>
-              <a:t>04.05.2026</a:t>
+              <a:t>05.05.2026</a:t>
             </a:fld>
             <a:endParaRPr lang="ru-RU"/>
           </a:p>
@@ -2326,7 +2324,7 @@
           <a:p>
             <a:fld id="{5F380086-0DB6-412B-89CD-F7FEDFE506DF}" type="datetime1">
               <a:rPr lang="ru-RU" smtClean="0"/>
-              <a:t>04.05.2026</a:t>
+              <a:t>05.05.2026</a:t>
             </a:fld>
             <a:endParaRPr lang="ru-RU"/>
           </a:p>
@@ -2417,7 +2415,7 @@
           <a:p>
             <a:fld id="{74212A90-9720-46C6-8C36-B0819B4DFE5B}" type="datetime1">
               <a:rPr lang="ru-RU" smtClean="0"/>
-              <a:t>04.05.2026</a:t>
+              <a:t>05.05.2026</a:t>
             </a:fld>
             <a:endParaRPr lang="ru-RU"/>
           </a:p>
@@ -2688,7 +2686,7 @@
           <a:p>
             <a:fld id="{AE8731BC-5F21-42E8-A2A7-D76EE8321363}" type="datetime1">
               <a:rPr lang="ru-RU" smtClean="0"/>
-              <a:t>04.05.2026</a:t>
+              <a:t>05.05.2026</a:t>
             </a:fld>
             <a:endParaRPr lang="ru-RU"/>
           </a:p>
@@ -2936,7 +2934,7 @@
           <a:p>
             <a:fld id="{AD5F7948-E270-4A34-A1A7-745149975F5C}" type="datetime1">
               <a:rPr lang="ru-RU" smtClean="0"/>
-              <a:t>04.05.2026</a:t>
+              <a:t>05.05.2026</a:t>
             </a:fld>
             <a:endParaRPr lang="ru-RU"/>
           </a:p>
@@ -3149,7 +3147,7 @@
           <a:p>
             <a:fld id="{17D6F28E-03ED-4FEB-A0B5-1290C2BD8F10}" type="datetime1">
               <a:rPr lang="ru-RU" smtClean="0"/>
-              <a:t>04.05.2026</a:t>
+              <a:t>05.05.2026</a:t>
             </a:fld>
             <a:endParaRPr lang="ru-RU"/>
           </a:p>
@@ -5923,314 +5921,6 @@
         </p:nvSpPr>
         <p:spPr>
           <a:xfrm>
-            <a:off x="488504" y="188640"/>
-            <a:ext cx="9138220" cy="1690091"/>
-          </a:xfrm>
-        </p:spPr>
-        <p:txBody>
-          <a:bodyPr>
-            <a:normAutofit fontScale="90000"/>
-          </a:bodyPr>
-          <a:lstStyle/>
-          <a:p>
-            <a:r>
-              <a:rPr lang="ru-RU" dirty="0"/>
-              <a:t>Симуляция результирующего модуля</a:t>
-            </a:r>
-            <a:br>
-              <a:rPr lang="ru-RU" dirty="0"/>
-            </a:br>
-            <a:r>
-              <a:rPr lang="en-US" dirty="0" err="1"/>
-              <a:t>top_module</a:t>
-            </a:r>
-            <a:r>
-              <a:rPr lang="en-US" dirty="0"/>
-              <a:t>.</a:t>
-            </a:r>
-            <a:br>
-              <a:rPr lang="ru-RU" dirty="0"/>
-            </a:br>
-            <a:r>
-              <a:rPr lang="ru-RU" dirty="0"/>
-              <a:t>Генерация первых 6 символов</a:t>
-            </a:r>
-          </a:p>
-        </p:txBody>
-      </p:sp>
-      <p:pic>
-        <p:nvPicPr>
-          <p:cNvPr id="3" name="Рисунок 2">
-            <a:extLst>
-              <a:ext uri="{FF2B5EF4-FFF2-40B4-BE49-F238E27FC236}">
-                <a16:creationId xmlns:a16="http://schemas.microsoft.com/office/drawing/2014/main" id="{7A1ABDB2-0BB0-632F-122B-1DFA92D24AC1}"/>
-              </a:ext>
-            </a:extLst>
-          </p:cNvPr>
-          <p:cNvPicPr>
-            <a:picLocks noChangeAspect="1"/>
-          </p:cNvPicPr>
-          <p:nvPr/>
-        </p:nvPicPr>
-        <p:blipFill>
-          <a:blip r:embed="rId2">
-            <a:extLst>
-              <a:ext uri="{28A0092B-C50C-407E-A947-70E740481C1C}">
-                <a14:useLocalDpi xmlns:a14="http://schemas.microsoft.com/office/drawing/2010/main" val="0"/>
-              </a:ext>
-            </a:extLst>
-          </a:blip>
-          <a:srcRect/>
-          <a:stretch>
-            <a:fillRect/>
-          </a:stretch>
-        </p:blipFill>
-        <p:spPr bwMode="auto">
-          <a:xfrm>
-            <a:off x="1208584" y="2276872"/>
-            <a:ext cx="7763645" cy="4032448"/>
-          </a:xfrm>
-          <a:prstGeom prst="rect">
-            <a:avLst/>
-          </a:prstGeom>
-          <a:noFill/>
-          <a:ln>
-            <a:noFill/>
-          </a:ln>
-        </p:spPr>
-      </p:pic>
-      <p:sp>
-        <p:nvSpPr>
-          <p:cNvPr id="6" name="Номер слайда 5">
-            <a:extLst>
-              <a:ext uri="{FF2B5EF4-FFF2-40B4-BE49-F238E27FC236}">
-                <a16:creationId xmlns:a16="http://schemas.microsoft.com/office/drawing/2014/main" id="{A5ABEB29-8A48-A428-20B1-F4D69FC24519}"/>
-              </a:ext>
-            </a:extLst>
-          </p:cNvPr>
-          <p:cNvSpPr>
-            <a:spLocks noGrp="1"/>
-          </p:cNvSpPr>
-          <p:nvPr>
-            <p:ph type="sldNum" sz="quarter" idx="12"/>
-          </p:nvPr>
-        </p:nvSpPr>
-        <p:spPr/>
-        <p:txBody>
-          <a:bodyPr/>
-          <a:lstStyle/>
-          <a:p>
-            <a:fld id="{DDCB711F-507F-4143-95C2-A9CD61F9272B}" type="slidenum">
-              <a:rPr lang="ru-RU" smtClean="0"/>
-              <a:pPr/>
-              <a:t>24</a:t>
-            </a:fld>
-            <a:endParaRPr lang="ru-RU"/>
-          </a:p>
-        </p:txBody>
-      </p:sp>
-    </p:spTree>
-    <p:extLst>
-      <p:ext uri="{BB962C8B-B14F-4D97-AF65-F5344CB8AC3E}">
-        <p14:creationId xmlns:p14="http://schemas.microsoft.com/office/powerpoint/2010/main" val="889762644"/>
-      </p:ext>
-    </p:extLst>
-  </p:cSld>
-  <p:clrMapOvr>
-    <a:masterClrMapping/>
-  </p:clrMapOvr>
-</p:sld>
-</file>
-
-<file path=ppt/slides/slide25.xml><?xml version="1.0" encoding="utf-8"?>
-<p:sld xmlns:a="http://schemas.openxmlformats.org/drawingml/2006/main" xmlns:r="http://schemas.openxmlformats.org/officeDocument/2006/relationships" xmlns:p="http://schemas.openxmlformats.org/presentationml/2006/main">
-  <p:cSld>
-    <p:spTree>
-      <p:nvGrpSpPr>
-        <p:cNvPr id="1" name=""/>
-        <p:cNvGrpSpPr/>
-        <p:nvPr/>
-      </p:nvGrpSpPr>
-      <p:grpSpPr>
-        <a:xfrm>
-          <a:off x="0" y="0"/>
-          <a:ext cx="0" cy="0"/>
-          <a:chOff x="0" y="0"/>
-          <a:chExt cx="0" cy="0"/>
-        </a:xfrm>
-      </p:grpSpPr>
-      <p:sp>
-        <p:nvSpPr>
-          <p:cNvPr id="2" name="Заголовок 1">
-            <a:extLst>
-              <a:ext uri="{FF2B5EF4-FFF2-40B4-BE49-F238E27FC236}">
-                <a16:creationId xmlns:a16="http://schemas.microsoft.com/office/drawing/2014/main" id="{1CED7DC9-3F2E-A90E-D2FF-544975EAC89D}"/>
-              </a:ext>
-            </a:extLst>
-          </p:cNvPr>
-          <p:cNvSpPr>
-            <a:spLocks noGrp="1"/>
-          </p:cNvSpPr>
-          <p:nvPr>
-            <p:ph type="title"/>
-          </p:nvPr>
-        </p:nvSpPr>
-        <p:spPr>
-          <a:xfrm>
-            <a:off x="488504" y="188640"/>
-            <a:ext cx="9138220" cy="1690091"/>
-          </a:xfrm>
-        </p:spPr>
-        <p:txBody>
-          <a:bodyPr>
-            <a:normAutofit fontScale="90000"/>
-          </a:bodyPr>
-          <a:lstStyle/>
-          <a:p>
-            <a:r>
-              <a:rPr lang="ru-RU" dirty="0"/>
-              <a:t>Симуляция результирующего модуля</a:t>
-            </a:r>
-            <a:br>
-              <a:rPr lang="ru-RU" dirty="0"/>
-            </a:br>
-            <a:r>
-              <a:rPr lang="en-US" dirty="0" err="1"/>
-              <a:t>top_module</a:t>
-            </a:r>
-            <a:r>
-              <a:rPr lang="en-US" dirty="0"/>
-              <a:t>.</a:t>
-            </a:r>
-            <a:br>
-              <a:rPr lang="ru-RU" dirty="0"/>
-            </a:br>
-            <a:r>
-              <a:rPr lang="ru-RU" dirty="0"/>
-              <a:t>Генерация первых 6 символов</a:t>
-            </a:r>
-          </a:p>
-        </p:txBody>
-      </p:sp>
-      <p:pic>
-        <p:nvPicPr>
-          <p:cNvPr id="3" name="Рисунок 2">
-            <a:extLst>
-              <a:ext uri="{FF2B5EF4-FFF2-40B4-BE49-F238E27FC236}">
-                <a16:creationId xmlns:a16="http://schemas.microsoft.com/office/drawing/2014/main" id="{7A1ABDB2-0BB0-632F-122B-1DFA92D24AC1}"/>
-              </a:ext>
-            </a:extLst>
-          </p:cNvPr>
-          <p:cNvPicPr>
-            <a:picLocks noChangeAspect="1"/>
-          </p:cNvPicPr>
-          <p:nvPr/>
-        </p:nvPicPr>
-        <p:blipFill>
-          <a:blip r:embed="rId2">
-            <a:extLst>
-              <a:ext uri="{28A0092B-C50C-407E-A947-70E740481C1C}">
-                <a14:useLocalDpi xmlns:a14="http://schemas.microsoft.com/office/drawing/2010/main" val="0"/>
-              </a:ext>
-            </a:extLst>
-          </a:blip>
-          <a:srcRect/>
-          <a:stretch>
-            <a:fillRect/>
-          </a:stretch>
-        </p:blipFill>
-        <p:spPr bwMode="auto">
-          <a:xfrm>
-            <a:off x="1208584" y="2276872"/>
-            <a:ext cx="7763645" cy="4032448"/>
-          </a:xfrm>
-          <a:prstGeom prst="rect">
-            <a:avLst/>
-          </a:prstGeom>
-          <a:noFill/>
-          <a:ln>
-            <a:noFill/>
-          </a:ln>
-        </p:spPr>
-      </p:pic>
-      <p:sp>
-        <p:nvSpPr>
-          <p:cNvPr id="6" name="Номер слайда 5">
-            <a:extLst>
-              <a:ext uri="{FF2B5EF4-FFF2-40B4-BE49-F238E27FC236}">
-                <a16:creationId xmlns:a16="http://schemas.microsoft.com/office/drawing/2014/main" id="{C6020175-47F5-8044-1D85-361C4DB9E88D}"/>
-              </a:ext>
-            </a:extLst>
-          </p:cNvPr>
-          <p:cNvSpPr>
-            <a:spLocks noGrp="1"/>
-          </p:cNvSpPr>
-          <p:nvPr>
-            <p:ph type="sldNum" sz="quarter" idx="12"/>
-          </p:nvPr>
-        </p:nvSpPr>
-        <p:spPr/>
-        <p:txBody>
-          <a:bodyPr/>
-          <a:lstStyle/>
-          <a:p>
-            <a:fld id="{DDCB711F-507F-4143-95C2-A9CD61F9272B}" type="slidenum">
-              <a:rPr lang="ru-RU" smtClean="0"/>
-              <a:pPr/>
-              <a:t>25</a:t>
-            </a:fld>
-            <a:endParaRPr lang="ru-RU"/>
-          </a:p>
-        </p:txBody>
-      </p:sp>
-    </p:spTree>
-    <p:extLst>
-      <p:ext uri="{BB962C8B-B14F-4D97-AF65-F5344CB8AC3E}">
-        <p14:creationId xmlns:p14="http://schemas.microsoft.com/office/powerpoint/2010/main" val="2374382552"/>
-      </p:ext>
-    </p:extLst>
-  </p:cSld>
-  <p:clrMapOvr>
-    <a:masterClrMapping/>
-  </p:clrMapOvr>
-</p:sld>
-</file>
-
-<file path=ppt/slides/slide26.xml><?xml version="1.0" encoding="utf-8"?>
-<p:sld xmlns:a="http://schemas.openxmlformats.org/drawingml/2006/main" xmlns:r="http://schemas.openxmlformats.org/officeDocument/2006/relationships" xmlns:p="http://schemas.openxmlformats.org/presentationml/2006/main">
-  <p:cSld>
-    <p:spTree>
-      <p:nvGrpSpPr>
-        <p:cNvPr id="1" name=""/>
-        <p:cNvGrpSpPr/>
-        <p:nvPr/>
-      </p:nvGrpSpPr>
-      <p:grpSpPr>
-        <a:xfrm>
-          <a:off x="0" y="0"/>
-          <a:ext cx="0" cy="0"/>
-          <a:chOff x="0" y="0"/>
-          <a:chExt cx="0" cy="0"/>
-        </a:xfrm>
-      </p:grpSpPr>
-      <p:sp>
-        <p:nvSpPr>
-          <p:cNvPr id="2" name="Заголовок 1">
-            <a:extLst>
-              <a:ext uri="{FF2B5EF4-FFF2-40B4-BE49-F238E27FC236}">
-                <a16:creationId xmlns:a16="http://schemas.microsoft.com/office/drawing/2014/main" id="{1CED7DC9-3F2E-A90E-D2FF-544975EAC89D}"/>
-              </a:ext>
-            </a:extLst>
-          </p:cNvPr>
-          <p:cNvSpPr>
-            <a:spLocks noGrp="1"/>
-          </p:cNvSpPr>
-          <p:nvPr>
-            <p:ph type="title"/>
-          </p:nvPr>
-        </p:nvSpPr>
-        <p:spPr>
-          <a:xfrm>
             <a:off x="488504" y="188641"/>
             <a:ext cx="9001000" cy="1512168"/>
           </a:xfrm>
@@ -6361,7 +6051,7 @@
             <a:fld id="{DDCB711F-507F-4143-95C2-A9CD61F9272B}" type="slidenum">
               <a:rPr lang="ru-RU" smtClean="0"/>
               <a:pPr/>
-              <a:t>26</a:t>
+              <a:t>24</a:t>
             </a:fld>
             <a:endParaRPr lang="ru-RU"/>
           </a:p>
@@ -6380,7 +6070,7 @@
 </p:sld>
 </file>
 
-<file path=ppt/slides/slide27.xml><?xml version="1.0" encoding="utf-8"?>
+<file path=ppt/slides/slide25.xml><?xml version="1.0" encoding="utf-8"?>
 <p:sld xmlns:a="http://schemas.openxmlformats.org/drawingml/2006/main" xmlns:r="http://schemas.openxmlformats.org/officeDocument/2006/relationships" xmlns:p="http://schemas.openxmlformats.org/presentationml/2006/main">
   <p:cSld>
     <p:spTree>
@@ -6507,7 +6197,7 @@
             <a:fld id="{DDCB711F-507F-4143-95C2-A9CD61F9272B}" type="slidenum">
               <a:rPr lang="ru-RU" smtClean="0"/>
               <a:pPr/>
-              <a:t>27</a:t>
+              <a:t>25</a:t>
             </a:fld>
             <a:endParaRPr lang="ru-RU"/>
           </a:p>
